--- a/Teaching/Chemistry/Labs/FCC Chem 3A Expt 4a Law of Constant Composition.pptx
+++ b/Teaching/Chemistry/Labs/FCC Chem 3A Expt 4a Law of Constant Composition.pptx
@@ -5,7 +5,7 @@
     <p:sldMasterId id="2147483803" r:id="rId1"/>
   </p:sldMasterIdLst>
   <p:notesMasterIdLst>
-    <p:notesMasterId r:id="rId15"/>
+    <p:notesMasterId r:id="rId19"/>
   </p:notesMasterIdLst>
   <p:sldIdLst>
     <p:sldId id="608" r:id="rId2"/>
@@ -21,6 +21,10 @@
     <p:sldId id="621" r:id="rId12"/>
     <p:sldId id="623" r:id="rId13"/>
     <p:sldId id="612" r:id="rId14"/>
+    <p:sldId id="624" r:id="rId15"/>
+    <p:sldId id="625" r:id="rId16"/>
+    <p:sldId id="626" r:id="rId17"/>
+    <p:sldId id="627" r:id="rId18"/>
   </p:sldIdLst>
   <p:sldSz cx="9144000" cy="6858000" type="screen4x3"/>
   <p:notesSz cx="7315200" cy="9601200"/>
@@ -11021,8 +11025,8 @@
           </a:p>
         </p:txBody>
       </p:sp>
-      <mc:AlternateContent xmlns:mc="http://schemas.openxmlformats.org/markup-compatibility/2006">
-        <mc:Choice xmlns:a14="http://schemas.microsoft.com/office/drawing/2010/main" Requires="a14">
+      <mc:AlternateContent xmlns:mc="http://schemas.openxmlformats.org/markup-compatibility/2006" xmlns:a14="http://schemas.microsoft.com/office/drawing/2010/main">
+        <mc:Choice Requires="a14">
           <p:sp>
             <p:nvSpPr>
               <p:cNvPr id="6" name="Content Placeholder 5">
@@ -11501,7 +11505,7 @@
             </p:txBody>
           </p:sp>
         </mc:Choice>
-        <mc:Fallback>
+        <mc:Fallback xmlns="">
           <p:sp>
             <p:nvSpPr>
               <p:cNvPr id="6" name="Content Placeholder 5">
@@ -11662,6 +11666,396 @@
 </p:sld>
 </file>
 
+<file path=ppt/slides/slide14.xml><?xml version="1.0" encoding="utf-8"?>
+<p:sld xmlns:a="http://schemas.openxmlformats.org/drawingml/2006/main" xmlns:r="http://schemas.openxmlformats.org/officeDocument/2006/relationships" xmlns:p="http://schemas.openxmlformats.org/presentationml/2006/main">
+  <p:cSld>
+    <p:spTree>
+      <p:nvGrpSpPr>
+        <p:cNvPr id="1" name=""/>
+        <p:cNvGrpSpPr/>
+        <p:nvPr/>
+      </p:nvGrpSpPr>
+      <p:grpSpPr>
+        <a:xfrm>
+          <a:off x="0" y="0"/>
+          <a:ext cx="0" cy="0"/>
+          <a:chOff x="0" y="0"/>
+          <a:chExt cx="0" cy="0"/>
+        </a:xfrm>
+      </p:grpSpPr>
+      <p:sp>
+        <p:nvSpPr>
+          <p:cNvPr id="2" name="Title 1">
+            <a:extLst>
+              <a:ext uri="{FF2B5EF4-FFF2-40B4-BE49-F238E27FC236}">
+                <a16:creationId xmlns:a16="http://schemas.microsoft.com/office/drawing/2014/main" id="{15462DE4-6035-DCE6-16FB-77F6E683A738}"/>
+              </a:ext>
+            </a:extLst>
+          </p:cNvPr>
+          <p:cNvSpPr>
+            <a:spLocks noGrp="1"/>
+          </p:cNvSpPr>
+          <p:nvPr>
+            <p:ph type="title"/>
+          </p:nvPr>
+        </p:nvSpPr>
+        <p:spPr>
+          <a:xfrm>
+            <a:off x="349955" y="496593"/>
+            <a:ext cx="2306168" cy="1938992"/>
+          </a:xfrm>
+        </p:spPr>
+        <p:txBody>
+          <a:bodyPr/>
+          <a:lstStyle/>
+          <a:p>
+            <a:r>
+              <a:rPr lang="en-US" sz="4000" dirty="0"/>
+              <a:t>Example Data Analysis</a:t>
+            </a:r>
+          </a:p>
+        </p:txBody>
+      </p:sp>
+      <p:pic>
+        <p:nvPicPr>
+          <p:cNvPr id="7" name="Picture 6">
+            <a:extLst>
+              <a:ext uri="{FF2B5EF4-FFF2-40B4-BE49-F238E27FC236}">
+                <a16:creationId xmlns:a16="http://schemas.microsoft.com/office/drawing/2014/main" id="{D9869F6C-4F8D-0A2D-45F0-550869932A78}"/>
+              </a:ext>
+            </a:extLst>
+          </p:cNvPr>
+          <p:cNvPicPr>
+            <a:picLocks noChangeAspect="1"/>
+          </p:cNvPicPr>
+          <p:nvPr/>
+        </p:nvPicPr>
+        <p:blipFill>
+          <a:blip r:embed="rId2"/>
+          <a:stretch>
+            <a:fillRect/>
+          </a:stretch>
+        </p:blipFill>
+        <p:spPr>
+          <a:xfrm>
+            <a:off x="2656123" y="380051"/>
+            <a:ext cx="6420214" cy="6289689"/>
+          </a:xfrm>
+          <a:prstGeom prst="rect">
+            <a:avLst/>
+          </a:prstGeom>
+        </p:spPr>
+      </p:pic>
+    </p:spTree>
+    <p:extLst>
+      <p:ext uri="{BB962C8B-B14F-4D97-AF65-F5344CB8AC3E}">
+        <p14:creationId xmlns:p14="http://schemas.microsoft.com/office/powerpoint/2010/main" val="2979199154"/>
+      </p:ext>
+    </p:extLst>
+  </p:cSld>
+  <p:clrMapOvr>
+    <a:masterClrMapping/>
+  </p:clrMapOvr>
+</p:sld>
+</file>
+
+<file path=ppt/slides/slide15.xml><?xml version="1.0" encoding="utf-8"?>
+<p:sld xmlns:a="http://schemas.openxmlformats.org/drawingml/2006/main" xmlns:r="http://schemas.openxmlformats.org/officeDocument/2006/relationships" xmlns:p="http://schemas.openxmlformats.org/presentationml/2006/main">
+  <p:cSld>
+    <p:spTree>
+      <p:nvGrpSpPr>
+        <p:cNvPr id="1" name="">
+          <a:extLst>
+            <a:ext uri="{FF2B5EF4-FFF2-40B4-BE49-F238E27FC236}">
+              <a16:creationId xmlns:a16="http://schemas.microsoft.com/office/drawing/2014/main" id="{62B40F35-4247-4E35-EA00-2EF54813A93C}"/>
+            </a:ext>
+          </a:extLst>
+        </p:cNvPr>
+        <p:cNvGrpSpPr/>
+        <p:nvPr/>
+      </p:nvGrpSpPr>
+      <p:grpSpPr>
+        <a:xfrm>
+          <a:off x="0" y="0"/>
+          <a:ext cx="0" cy="0"/>
+          <a:chOff x="0" y="0"/>
+          <a:chExt cx="0" cy="0"/>
+        </a:xfrm>
+      </p:grpSpPr>
+      <p:sp>
+        <p:nvSpPr>
+          <p:cNvPr id="2" name="Title 1">
+            <a:extLst>
+              <a:ext uri="{FF2B5EF4-FFF2-40B4-BE49-F238E27FC236}">
+                <a16:creationId xmlns:a16="http://schemas.microsoft.com/office/drawing/2014/main" id="{A95C1C99-CE4C-49A6-113C-18116D58F9AB}"/>
+              </a:ext>
+            </a:extLst>
+          </p:cNvPr>
+          <p:cNvSpPr>
+            <a:spLocks noGrp="1"/>
+          </p:cNvSpPr>
+          <p:nvPr>
+            <p:ph type="title"/>
+          </p:nvPr>
+        </p:nvSpPr>
+        <p:spPr>
+          <a:xfrm>
+            <a:off x="249747" y="202317"/>
+            <a:ext cx="8430790" cy="830997"/>
+          </a:xfrm>
+        </p:spPr>
+        <p:txBody>
+          <a:bodyPr/>
+          <a:lstStyle/>
+          <a:p>
+            <a:r>
+              <a:rPr lang="en-US" dirty="0"/>
+              <a:t>Example Data Analysis</a:t>
+            </a:r>
+          </a:p>
+        </p:txBody>
+      </p:sp>
+      <p:pic>
+        <p:nvPicPr>
+          <p:cNvPr id="4" name="Picture 3">
+            <a:extLst>
+              <a:ext uri="{FF2B5EF4-FFF2-40B4-BE49-F238E27FC236}">
+                <a16:creationId xmlns:a16="http://schemas.microsoft.com/office/drawing/2014/main" id="{897E24B8-A661-5F19-C07D-445FC58F1ED3}"/>
+              </a:ext>
+            </a:extLst>
+          </p:cNvPr>
+          <p:cNvPicPr>
+            <a:picLocks noChangeAspect="1"/>
+          </p:cNvPicPr>
+          <p:nvPr/>
+        </p:nvPicPr>
+        <p:blipFill>
+          <a:blip r:embed="rId2"/>
+          <a:stretch>
+            <a:fillRect/>
+          </a:stretch>
+        </p:blipFill>
+        <p:spPr>
+          <a:xfrm>
+            <a:off x="818626" y="1662363"/>
+            <a:ext cx="7506748" cy="4429743"/>
+          </a:xfrm>
+          <a:prstGeom prst="rect">
+            <a:avLst/>
+          </a:prstGeom>
+        </p:spPr>
+      </p:pic>
+    </p:spTree>
+    <p:extLst>
+      <p:ext uri="{BB962C8B-B14F-4D97-AF65-F5344CB8AC3E}">
+        <p14:creationId xmlns:p14="http://schemas.microsoft.com/office/powerpoint/2010/main" val="214902505"/>
+      </p:ext>
+    </p:extLst>
+  </p:cSld>
+  <p:clrMapOvr>
+    <a:masterClrMapping/>
+  </p:clrMapOvr>
+</p:sld>
+</file>
+
+<file path=ppt/slides/slide16.xml><?xml version="1.0" encoding="utf-8"?>
+<p:sld xmlns:a="http://schemas.openxmlformats.org/drawingml/2006/main" xmlns:r="http://schemas.openxmlformats.org/officeDocument/2006/relationships" xmlns:p="http://schemas.openxmlformats.org/presentationml/2006/main">
+  <p:cSld>
+    <p:spTree>
+      <p:nvGrpSpPr>
+        <p:cNvPr id="1" name="">
+          <a:extLst>
+            <a:ext uri="{FF2B5EF4-FFF2-40B4-BE49-F238E27FC236}">
+              <a16:creationId xmlns:a16="http://schemas.microsoft.com/office/drawing/2014/main" id="{B54F0D9C-4993-DF31-AEFB-187EEC09B11F}"/>
+            </a:ext>
+          </a:extLst>
+        </p:cNvPr>
+        <p:cNvGrpSpPr/>
+        <p:nvPr/>
+      </p:nvGrpSpPr>
+      <p:grpSpPr>
+        <a:xfrm>
+          <a:off x="0" y="0"/>
+          <a:ext cx="0" cy="0"/>
+          <a:chOff x="0" y="0"/>
+          <a:chExt cx="0" cy="0"/>
+        </a:xfrm>
+      </p:grpSpPr>
+      <p:sp>
+        <p:nvSpPr>
+          <p:cNvPr id="7" name="Title 6">
+            <a:extLst>
+              <a:ext uri="{FF2B5EF4-FFF2-40B4-BE49-F238E27FC236}">
+                <a16:creationId xmlns:a16="http://schemas.microsoft.com/office/drawing/2014/main" id="{D6EAA948-2530-5ACF-6160-1AEF4B4C2C69}"/>
+              </a:ext>
+            </a:extLst>
+          </p:cNvPr>
+          <p:cNvSpPr>
+            <a:spLocks noGrp="1"/>
+          </p:cNvSpPr>
+          <p:nvPr>
+            <p:ph type="title"/>
+          </p:nvPr>
+        </p:nvSpPr>
+        <p:spPr>
+          <a:xfrm>
+            <a:off x="361244" y="295954"/>
+            <a:ext cx="8421512" cy="769441"/>
+          </a:xfrm>
+        </p:spPr>
+        <p:txBody>
+          <a:bodyPr/>
+          <a:lstStyle/>
+          <a:p>
+            <a:r>
+              <a:rPr lang="en-US" sz="4400" dirty="0"/>
+              <a:t>Example Data Analysis</a:t>
+            </a:r>
+          </a:p>
+        </p:txBody>
+      </p:sp>
+      <p:pic>
+        <p:nvPicPr>
+          <p:cNvPr id="9" name="Picture 8">
+            <a:extLst>
+              <a:ext uri="{FF2B5EF4-FFF2-40B4-BE49-F238E27FC236}">
+                <a16:creationId xmlns:a16="http://schemas.microsoft.com/office/drawing/2014/main" id="{BD44B8E1-077C-4FCB-FF43-80CFA329AD67}"/>
+              </a:ext>
+            </a:extLst>
+          </p:cNvPr>
+          <p:cNvPicPr>
+            <a:picLocks noChangeAspect="1"/>
+          </p:cNvPicPr>
+          <p:nvPr/>
+        </p:nvPicPr>
+        <p:blipFill>
+          <a:blip r:embed="rId2"/>
+          <a:stretch>
+            <a:fillRect/>
+          </a:stretch>
+        </p:blipFill>
+        <p:spPr>
+          <a:xfrm>
+            <a:off x="1057836" y="1176856"/>
+            <a:ext cx="7190788" cy="5496201"/>
+          </a:xfrm>
+          <a:prstGeom prst="rect">
+            <a:avLst/>
+          </a:prstGeom>
+        </p:spPr>
+      </p:pic>
+    </p:spTree>
+    <p:extLst>
+      <p:ext uri="{BB962C8B-B14F-4D97-AF65-F5344CB8AC3E}">
+        <p14:creationId xmlns:p14="http://schemas.microsoft.com/office/powerpoint/2010/main" val="289122168"/>
+      </p:ext>
+    </p:extLst>
+  </p:cSld>
+  <p:clrMapOvr>
+    <a:masterClrMapping/>
+  </p:clrMapOvr>
+</p:sld>
+</file>
+
+<file path=ppt/slides/slide17.xml><?xml version="1.0" encoding="utf-8"?>
+<p:sld xmlns:a="http://schemas.openxmlformats.org/drawingml/2006/main" xmlns:r="http://schemas.openxmlformats.org/officeDocument/2006/relationships" xmlns:p="http://schemas.openxmlformats.org/presentationml/2006/main">
+  <p:cSld>
+    <p:spTree>
+      <p:nvGrpSpPr>
+        <p:cNvPr id="1" name="">
+          <a:extLst>
+            <a:ext uri="{FF2B5EF4-FFF2-40B4-BE49-F238E27FC236}">
+              <a16:creationId xmlns:a16="http://schemas.microsoft.com/office/drawing/2014/main" id="{F2E9416F-CF30-8736-6484-A184C0A3C8FB}"/>
+            </a:ext>
+          </a:extLst>
+        </p:cNvPr>
+        <p:cNvGrpSpPr/>
+        <p:nvPr/>
+      </p:nvGrpSpPr>
+      <p:grpSpPr>
+        <a:xfrm>
+          <a:off x="0" y="0"/>
+          <a:ext cx="0" cy="0"/>
+          <a:chOff x="0" y="0"/>
+          <a:chExt cx="0" cy="0"/>
+        </a:xfrm>
+      </p:grpSpPr>
+      <p:sp>
+        <p:nvSpPr>
+          <p:cNvPr id="7" name="Title 6">
+            <a:extLst>
+              <a:ext uri="{FF2B5EF4-FFF2-40B4-BE49-F238E27FC236}">
+                <a16:creationId xmlns:a16="http://schemas.microsoft.com/office/drawing/2014/main" id="{13C178CB-2C12-C292-CE52-B92818376FCC}"/>
+              </a:ext>
+            </a:extLst>
+          </p:cNvPr>
+          <p:cNvSpPr>
+            <a:spLocks noGrp="1"/>
+          </p:cNvSpPr>
+          <p:nvPr>
+            <p:ph type="title"/>
+          </p:nvPr>
+        </p:nvSpPr>
+        <p:spPr>
+          <a:xfrm>
+            <a:off x="361244" y="165897"/>
+            <a:ext cx="8421512" cy="769441"/>
+          </a:xfrm>
+        </p:spPr>
+        <p:txBody>
+          <a:bodyPr/>
+          <a:lstStyle/>
+          <a:p>
+            <a:r>
+              <a:rPr lang="en-US" sz="4400" dirty="0"/>
+              <a:t>Example Data Analysis</a:t>
+            </a:r>
+          </a:p>
+        </p:txBody>
+      </p:sp>
+      <p:pic>
+        <p:nvPicPr>
+          <p:cNvPr id="3" name="Picture 2">
+            <a:extLst>
+              <a:ext uri="{FF2B5EF4-FFF2-40B4-BE49-F238E27FC236}">
+                <a16:creationId xmlns:a16="http://schemas.microsoft.com/office/drawing/2014/main" id="{53195A36-2045-2F27-96D8-25F6DABF9115}"/>
+              </a:ext>
+            </a:extLst>
+          </p:cNvPr>
+          <p:cNvPicPr>
+            <a:picLocks noChangeAspect="1"/>
+          </p:cNvPicPr>
+          <p:nvPr/>
+        </p:nvPicPr>
+        <p:blipFill>
+          <a:blip r:embed="rId2"/>
+          <a:stretch>
+            <a:fillRect/>
+          </a:stretch>
+        </p:blipFill>
+        <p:spPr>
+          <a:xfrm>
+            <a:off x="2008094" y="935338"/>
+            <a:ext cx="6089498" cy="5922662"/>
+          </a:xfrm>
+          <a:prstGeom prst="rect">
+            <a:avLst/>
+          </a:prstGeom>
+        </p:spPr>
+      </p:pic>
+    </p:spTree>
+    <p:extLst>
+      <p:ext uri="{BB962C8B-B14F-4D97-AF65-F5344CB8AC3E}">
+        <p14:creationId xmlns:p14="http://schemas.microsoft.com/office/powerpoint/2010/main" val="1267017031"/>
+      </p:ext>
+    </p:extLst>
+  </p:cSld>
+  <p:clrMapOvr>
+    <a:masterClrMapping/>
+  </p:clrMapOvr>
+</p:sld>
+</file>
+
 <file path=ppt/slides/slide2.xml><?xml version="1.0" encoding="utf-8"?>
 <p:sld xmlns:a="http://schemas.openxmlformats.org/drawingml/2006/main" xmlns:r="http://schemas.openxmlformats.org/officeDocument/2006/relationships" xmlns:p="http://schemas.openxmlformats.org/presentationml/2006/main">
   <p:cSld>
@@ -12307,8 +12701,8 @@
           </a:p>
         </p:txBody>
       </p:sp>
-      <mc:AlternateContent xmlns:mc="http://schemas.openxmlformats.org/markup-compatibility/2006">
-        <mc:Choice xmlns:a14="http://schemas.microsoft.com/office/drawing/2010/main" Requires="a14">
+      <mc:AlternateContent xmlns:mc="http://schemas.openxmlformats.org/markup-compatibility/2006" xmlns:a14="http://schemas.microsoft.com/office/drawing/2010/main">
+        <mc:Choice Requires="a14">
           <p:sp>
             <p:nvSpPr>
               <p:cNvPr id="3" name="Content Placeholder 2">
@@ -12868,7 +13262,7 @@
             </p:txBody>
           </p:sp>
         </mc:Choice>
-        <mc:Fallback>
+        <mc:Fallback xmlns="">
           <p:sp>
             <p:nvSpPr>
               <p:cNvPr id="3" name="Content Placeholder 2">
